--- a/docs/GZG语言介绍.pptx
+++ b/docs/GZG语言介绍.pptx
@@ -3352,7 +3352,7 @@
                 <a:ea typeface="Microsoft YaHei"/>
                 <a:cs typeface="Microsoft YaHei"/>
               </a:rPr>
-              <a:t>C99 字节码虚拟机  ·  7,815 行解释器  ·  136 个黑盒测试  ·  Agent 开发的 2048</a:t>
+              <a:t>C99 字节码虚拟机  ·  7,897 行解释器  ·  327 个黑盒测试  ·  Agent 开发的 2048</a:t>
             </a:r>
           </a:p>
         </p:txBody>
@@ -4393,7 +4393,7 @@
                 <a:ea typeface="Microsoft YaHei"/>
                 <a:cs typeface="Consolas"/>
               </a:rPr>
-              <a:t>[统计] 总耗时 0.617 秒；GC 15 次，共 0.229 秒（37.1%）；</a:t>
+              <a:t>[统计] 总耗时 0.574 秒；GC 15 次，共 0.207 秒（36.1%）；</a:t>
             </a:r>
           </a:p>
           <a:p>
@@ -4465,7 +4465,7 @@
                 <a:ea typeface="Microsoft YaHei"/>
                 <a:cs typeface="Consolas"/>
               </a:rPr>
-              <a:t>[统计] 总耗时 0.188 秒；GC 0 次，共 0.000 秒（0.0%）；</a:t>
+              <a:t>[统计] 总耗时 0.182 秒；GC 0 次，共 0.000 秒（0.0%）；</a:t>
             </a:r>
           </a:p>
           <a:p>
@@ -4640,7 +4640,7 @@
                 <a:ea typeface="Microsoft YaHei"/>
                 <a:cs typeface="Microsoft YaHei"/>
               </a:rPr>
-              <a:t>自动化测试：136 个黑盒测试，一个命令全部运行</a:t>
+              <a:t>自动化测试：327 个黑盒测试，一个命令全部运行</a:t>
             </a:r>
           </a:p>
         </p:txBody>
@@ -5112,7 +5112,7 @@
         </p:nvGraphicFramePr>
         <p:xfrm>
           <a:off x="5943600" y="1463040"/>
-          <a:ext cx="5760720" cy="1508760"/>
+          <a:ext cx="5760720" cy="3319272"/>
         </p:xfrm>
         <a:graphic>
           <a:graphicData uri="http://schemas.openxmlformats.org/drawingml/2006/table">
@@ -5239,7 +5239,7 @@
                           <a:ea typeface="Microsoft YaHei"/>
                           <a:cs typeface="Microsoft YaHei"/>
                         </a:rPr>
-                        <a:t>operators</a:t>
+                        <a:t>builtins</a:t>
                       </a:r>
                     </a:p>
                   </a:txBody>
@@ -5263,7 +5263,7 @@
                           <a:ea typeface="Microsoft YaHei"/>
                           <a:cs typeface="Microsoft YaHei"/>
                         </a:rPr>
-                        <a:t>23</a:t>
+                        <a:t>29</a:t>
                       </a:r>
                     </a:p>
                   </a:txBody>
@@ -5287,7 +5287,7 @@
                           <a:ea typeface="Microsoft YaHei"/>
                           <a:cs typeface="Microsoft YaHei"/>
                         </a:rPr>
-                        <a:t>strings</a:t>
+                        <a:t>maps</a:t>
                       </a:r>
                     </a:p>
                   </a:txBody>
@@ -5311,7 +5311,7 @@
                           <a:ea typeface="Microsoft YaHei"/>
                           <a:cs typeface="Microsoft YaHei"/>
                         </a:rPr>
-                        <a:t>18</a:t>
+                        <a:t>15</a:t>
                       </a:r>
                     </a:p>
                   </a:txBody>
@@ -5337,7 +5337,399 @@
                           <a:ea typeface="Microsoft YaHei"/>
                           <a:cs typeface="Microsoft YaHei"/>
                         </a:rPr>
+                        <a:t>errors</a:t>
+                      </a:r>
+                    </a:p>
+                  </a:txBody>
+                  <a:tcPr marL="73152" marR="73152" anchor="ctr">
+                    <a:solidFill>
+                      <a:srgbClr val="E8EEF6"/>
+                    </a:solidFill>
+                  </a:tcPr>
+                </a:tc>
+                <a:tc>
+                  <a:txBody>
+                    <a:bodyPr/>
+                    <a:lstStyle/>
+                    <a:p>
+                      <a:r>
+                        <a:rPr sz="1200" b="0">
+                          <a:solidFill>
+                            <a:srgbClr val="2B2B2B"/>
+                          </a:solidFill>
+                          <a:latin typeface="Microsoft YaHei"/>
+                          <a:ea typeface="Microsoft YaHei"/>
+                          <a:cs typeface="Microsoft YaHei"/>
+                        </a:rPr>
+                        <a:t>29</a:t>
+                      </a:r>
+                    </a:p>
+                  </a:txBody>
+                  <a:tcPr marL="73152" marR="73152" anchor="ctr">
+                    <a:solidFill>
+                      <a:srgbClr val="E8EEF6"/>
+                    </a:solidFill>
+                  </a:tcPr>
+                </a:tc>
+                <a:tc>
+                  <a:txBody>
+                    <a:bodyPr/>
+                    <a:lstStyle/>
+                    <a:p>
+                      <a:r>
+                        <a:rPr sz="1200" b="0">
+                          <a:solidFill>
+                            <a:srgbClr val="2B2B2B"/>
+                          </a:solidFill>
+                          <a:latin typeface="Microsoft YaHei"/>
+                          <a:ea typeface="Microsoft YaHei"/>
+                          <a:cs typeface="Microsoft YaHei"/>
+                        </a:rPr>
+                        <a:t>chinese</a:t>
+                      </a:r>
+                    </a:p>
+                  </a:txBody>
+                  <a:tcPr marL="73152" marR="73152" anchor="ctr">
+                    <a:solidFill>
+                      <a:srgbClr val="E8EEF6"/>
+                    </a:solidFill>
+                  </a:tcPr>
+                </a:tc>
+                <a:tc>
+                  <a:txBody>
+                    <a:bodyPr/>
+                    <a:lstStyle/>
+                    <a:p>
+                      <a:r>
+                        <a:rPr sz="1200" b="0">
+                          <a:solidFill>
+                            <a:srgbClr val="2B2B2B"/>
+                          </a:solidFill>
+                          <a:latin typeface="Microsoft YaHei"/>
+                          <a:ea typeface="Microsoft YaHei"/>
+                          <a:cs typeface="Microsoft YaHei"/>
+                        </a:rPr>
+                        <a:t>13</a:t>
+                      </a:r>
+                    </a:p>
+                  </a:txBody>
+                  <a:tcPr marL="73152" marR="73152" anchor="ctr">
+                    <a:solidFill>
+                      <a:srgbClr val="E8EEF6"/>
+                    </a:solidFill>
+                  </a:tcPr>
+                </a:tc>
+              </a:tr>
+              <a:tr h="301752">
+                <a:tc>
+                  <a:txBody>
+                    <a:bodyPr/>
+                    <a:lstStyle/>
+                    <a:p>
+                      <a:r>
+                        <a:rPr sz="1200" b="0">
+                          <a:solidFill>
+                            <a:srgbClr val="2B2B2B"/>
+                          </a:solidFill>
+                          <a:latin typeface="Microsoft YaHei"/>
+                          <a:ea typeface="Microsoft YaHei"/>
+                          <a:cs typeface="Microsoft YaHei"/>
+                        </a:rPr>
+                        <a:t>structs</a:t>
+                      </a:r>
+                    </a:p>
+                  </a:txBody>
+                  <a:tcPr marL="73152" marR="73152" anchor="ctr">
+                    <a:solidFill>
+                      <a:srgbClr val="FFFFFF"/>
+                    </a:solidFill>
+                  </a:tcPr>
+                </a:tc>
+                <a:tc>
+                  <a:txBody>
+                    <a:bodyPr/>
+                    <a:lstStyle/>
+                    <a:p>
+                      <a:r>
+                        <a:rPr sz="1200" b="0">
+                          <a:solidFill>
+                            <a:srgbClr val="2B2B2B"/>
+                          </a:solidFill>
+                          <a:latin typeface="Microsoft YaHei"/>
+                          <a:ea typeface="Microsoft YaHei"/>
+                          <a:cs typeface="Microsoft YaHei"/>
+                        </a:rPr>
+                        <a:t>25</a:t>
+                      </a:r>
+                    </a:p>
+                  </a:txBody>
+                  <a:tcPr marL="73152" marR="73152" anchor="ctr">
+                    <a:solidFill>
+                      <a:srgbClr val="FFFFFF"/>
+                    </a:solidFill>
+                  </a:tcPr>
+                </a:tc>
+                <a:tc>
+                  <a:txBody>
+                    <a:bodyPr/>
+                    <a:lstStyle/>
+                    <a:p>
+                      <a:r>
+                        <a:rPr sz="1200" b="0">
+                          <a:solidFill>
+                            <a:srgbClr val="2B2B2B"/>
+                          </a:solidFill>
+                          <a:latin typeface="Microsoft YaHei"/>
+                          <a:ea typeface="Microsoft YaHei"/>
+                          <a:cs typeface="Microsoft YaHei"/>
+                        </a:rPr>
+                        <a:t>io</a:t>
+                      </a:r>
+                    </a:p>
+                  </a:txBody>
+                  <a:tcPr marL="73152" marR="73152" anchor="ctr">
+                    <a:solidFill>
+                      <a:srgbClr val="FFFFFF"/>
+                    </a:solidFill>
+                  </a:tcPr>
+                </a:tc>
+                <a:tc>
+                  <a:txBody>
+                    <a:bodyPr/>
+                    <a:lstStyle/>
+                    <a:p>
+                      <a:r>
+                        <a:rPr sz="1200" b="0">
+                          <a:solidFill>
+                            <a:srgbClr val="2B2B2B"/>
+                          </a:solidFill>
+                          <a:latin typeface="Microsoft YaHei"/>
+                          <a:ea typeface="Microsoft YaHei"/>
+                          <a:cs typeface="Microsoft YaHei"/>
+                        </a:rPr>
+                        <a:t>13</a:t>
+                      </a:r>
+                    </a:p>
+                  </a:txBody>
+                  <a:tcPr marL="73152" marR="73152" anchor="ctr">
+                    <a:solidFill>
+                      <a:srgbClr val="FFFFFF"/>
+                    </a:solidFill>
+                  </a:tcPr>
+                </a:tc>
+              </a:tr>
+              <a:tr h="301752">
+                <a:tc>
+                  <a:txBody>
+                    <a:bodyPr/>
+                    <a:lstStyle/>
+                    <a:p>
+                      <a:r>
+                        <a:rPr sz="1200" b="0">
+                          <a:solidFill>
+                            <a:srgbClr val="2B2B2B"/>
+                          </a:solidFill>
+                          <a:latin typeface="Microsoft YaHei"/>
+                          <a:ea typeface="Microsoft YaHei"/>
+                          <a:cs typeface="Microsoft YaHei"/>
+                        </a:rPr>
+                        <a:t>operators</a:t>
+                      </a:r>
+                    </a:p>
+                  </a:txBody>
+                  <a:tcPr marL="73152" marR="73152" anchor="ctr">
+                    <a:solidFill>
+                      <a:srgbClr val="E8EEF6"/>
+                    </a:solidFill>
+                  </a:tcPr>
+                </a:tc>
+                <a:tc>
+                  <a:txBody>
+                    <a:bodyPr/>
+                    <a:lstStyle/>
+                    <a:p>
+                      <a:r>
+                        <a:rPr sz="1200" b="0">
+                          <a:solidFill>
+                            <a:srgbClr val="2B2B2B"/>
+                          </a:solidFill>
+                          <a:latin typeface="Microsoft YaHei"/>
+                          <a:ea typeface="Microsoft YaHei"/>
+                          <a:cs typeface="Microsoft YaHei"/>
+                        </a:rPr>
+                        <a:t>23</a:t>
+                      </a:r>
+                    </a:p>
+                  </a:txBody>
+                  <a:tcPr marL="73152" marR="73152" anchor="ctr">
+                    <a:solidFill>
+                      <a:srgbClr val="E8EEF6"/>
+                    </a:solidFill>
+                  </a:tcPr>
+                </a:tc>
+                <a:tc>
+                  <a:txBody>
+                    <a:bodyPr/>
+                    <a:lstStyle/>
+                    <a:p>
+                      <a:r>
+                        <a:rPr sz="1200" b="0">
+                          <a:solidFill>
+                            <a:srgbClr val="2B2B2B"/>
+                          </a:solidFill>
+                          <a:latin typeface="Microsoft YaHei"/>
+                          <a:ea typeface="Microsoft YaHei"/>
+                          <a:cs typeface="Microsoft YaHei"/>
+                        </a:rPr>
+                        <a:t>match</a:t>
+                      </a:r>
+                    </a:p>
+                  </a:txBody>
+                  <a:tcPr marL="73152" marR="73152" anchor="ctr">
+                    <a:solidFill>
+                      <a:srgbClr val="E8EEF6"/>
+                    </a:solidFill>
+                  </a:tcPr>
+                </a:tc>
+                <a:tc>
+                  <a:txBody>
+                    <a:bodyPr/>
+                    <a:lstStyle/>
+                    <a:p>
+                      <a:r>
+                        <a:rPr sz="1200" b="0">
+                          <a:solidFill>
+                            <a:srgbClr val="2B2B2B"/>
+                          </a:solidFill>
+                          <a:latin typeface="Microsoft YaHei"/>
+                          <a:ea typeface="Microsoft YaHei"/>
+                          <a:cs typeface="Microsoft YaHei"/>
+                        </a:rPr>
+                        <a:t>12</a:t>
+                      </a:r>
+                    </a:p>
+                  </a:txBody>
+                  <a:tcPr marL="73152" marR="73152" anchor="ctr">
+                    <a:solidFill>
+                      <a:srgbClr val="E8EEF6"/>
+                    </a:solidFill>
+                  </a:tcPr>
+                </a:tc>
+              </a:tr>
+              <a:tr h="301752">
+                <a:tc>
+                  <a:txBody>
+                    <a:bodyPr/>
+                    <a:lstStyle/>
+                    <a:p>
+                      <a:r>
+                        <a:rPr sz="1200" b="0">
+                          <a:solidFill>
+                            <a:srgbClr val="2B2B2B"/>
+                          </a:solidFill>
+                          <a:latin typeface="Microsoft YaHei"/>
+                          <a:ea typeface="Microsoft YaHei"/>
+                          <a:cs typeface="Microsoft YaHei"/>
+                        </a:rPr>
                         <a:t>arrays</a:t>
+                      </a:r>
+                    </a:p>
+                  </a:txBody>
+                  <a:tcPr marL="73152" marR="73152" anchor="ctr">
+                    <a:solidFill>
+                      <a:srgbClr val="FFFFFF"/>
+                    </a:solidFill>
+                  </a:tcPr>
+                </a:tc>
+                <a:tc>
+                  <a:txBody>
+                    <a:bodyPr/>
+                    <a:lstStyle/>
+                    <a:p>
+                      <a:r>
+                        <a:rPr sz="1200" b="0">
+                          <a:solidFill>
+                            <a:srgbClr val="2B2B2B"/>
+                          </a:solidFill>
+                          <a:latin typeface="Microsoft YaHei"/>
+                          <a:ea typeface="Microsoft YaHei"/>
+                          <a:cs typeface="Microsoft YaHei"/>
+                        </a:rPr>
+                        <a:t>22</a:t>
+                      </a:r>
+                    </a:p>
+                  </a:txBody>
+                  <a:tcPr marL="73152" marR="73152" anchor="ctr">
+                    <a:solidFill>
+                      <a:srgbClr val="FFFFFF"/>
+                    </a:solidFill>
+                  </a:tcPr>
+                </a:tc>
+                <a:tc>
+                  <a:txBody>
+                    <a:bodyPr/>
+                    <a:lstStyle/>
+                    <a:p>
+                      <a:r>
+                        <a:rPr sz="1200" b="0">
+                          <a:solidFill>
+                            <a:srgbClr val="2B2B2B"/>
+                          </a:solidFill>
+                          <a:latin typeface="Microsoft YaHei"/>
+                          <a:ea typeface="Microsoft YaHei"/>
+                          <a:cs typeface="Microsoft YaHei"/>
+                        </a:rPr>
+                        <a:t>programs</a:t>
+                      </a:r>
+                    </a:p>
+                  </a:txBody>
+                  <a:tcPr marL="73152" marR="73152" anchor="ctr">
+                    <a:solidFill>
+                      <a:srgbClr val="FFFFFF"/>
+                    </a:solidFill>
+                  </a:tcPr>
+                </a:tc>
+                <a:tc>
+                  <a:txBody>
+                    <a:bodyPr/>
+                    <a:lstStyle/>
+                    <a:p>
+                      <a:r>
+                        <a:rPr sz="1200" b="0">
+                          <a:solidFill>
+                            <a:srgbClr val="2B2B2B"/>
+                          </a:solidFill>
+                          <a:latin typeface="Microsoft YaHei"/>
+                          <a:ea typeface="Microsoft YaHei"/>
+                          <a:cs typeface="Microsoft YaHei"/>
+                        </a:rPr>
+                        <a:t>11</a:t>
+                      </a:r>
+                    </a:p>
+                  </a:txBody>
+                  <a:tcPr marL="73152" marR="73152" anchor="ctr">
+                    <a:solidFill>
+                      <a:srgbClr val="FFFFFF"/>
+                    </a:solidFill>
+                  </a:tcPr>
+                </a:tc>
+              </a:tr>
+              <a:tr h="301752">
+                <a:tc>
+                  <a:txBody>
+                    <a:bodyPr/>
+                    <a:lstStyle/>
+                    <a:p>
+                      <a:r>
+                        <a:rPr sz="1200" b="0">
+                          <a:solidFill>
+                            <a:srgbClr val="2B2B2B"/>
+                          </a:solidFill>
+                          <a:latin typeface="Microsoft YaHei"/>
+                          <a:ea typeface="Microsoft YaHei"/>
+                          <a:cs typeface="Microsoft YaHei"/>
+                        </a:rPr>
+                        <a:t>lexer</a:t>
                       </a:r>
                     </a:p>
                   </a:txBody>
@@ -5385,7 +5777,7 @@
                           <a:ea typeface="Microsoft YaHei"/>
                           <a:cs typeface="Microsoft YaHei"/>
                         </a:rPr>
-                        <a:t>types</a:t>
+                        <a:t>stress</a:t>
                       </a:r>
                     </a:p>
                   </a:txBody>
@@ -5409,7 +5801,7 @@
                           <a:ea typeface="Microsoft YaHei"/>
                           <a:cs typeface="Microsoft YaHei"/>
                         </a:rPr>
-                        <a:t>15</a:t>
+                        <a:t>11</a:t>
                       </a:r>
                     </a:p>
                   </a:txBody>
@@ -5435,7 +5827,7 @@
                           <a:ea typeface="Microsoft YaHei"/>
                           <a:cs typeface="Microsoft YaHei"/>
                         </a:rPr>
-                        <a:t>lexer</a:t>
+                        <a:t>functions</a:t>
                       </a:r>
                     </a:p>
                   </a:txBody>
@@ -5459,7 +5851,7 @@
                           <a:ea typeface="Microsoft YaHei"/>
                           <a:cs typeface="Microsoft YaHei"/>
                         </a:rPr>
-                        <a:t>22</a:t>
+                        <a:t>20</a:t>
                       </a:r>
                     </a:p>
                   </a:txBody>
@@ -5483,7 +5875,7 @@
                           <a:ea typeface="Microsoft YaHei"/>
                           <a:cs typeface="Microsoft YaHei"/>
                         </a:rPr>
-                        <a:t>maps</a:t>
+                        <a:t>modules</a:t>
                       </a:r>
                     </a:p>
                   </a:txBody>
@@ -5507,7 +5899,7 @@
                           <a:ea typeface="Microsoft YaHei"/>
                           <a:cs typeface="Microsoft YaHei"/>
                         </a:rPr>
-                        <a:t>13</a:t>
+                        <a:t>10</a:t>
                       </a:r>
                     </a:p>
                   </a:txBody>
@@ -5581,6 +5973,202 @@
                           <a:ea typeface="Microsoft YaHei"/>
                           <a:cs typeface="Microsoft YaHei"/>
                         </a:rPr>
+                        <a:t>closures</a:t>
+                      </a:r>
+                    </a:p>
+                  </a:txBody>
+                  <a:tcPr marL="73152" marR="73152" anchor="ctr">
+                    <a:solidFill>
+                      <a:srgbClr val="E8EEF6"/>
+                    </a:solidFill>
+                  </a:tcPr>
+                </a:tc>
+                <a:tc>
+                  <a:txBody>
+                    <a:bodyPr/>
+                    <a:lstStyle/>
+                    <a:p>
+                      <a:r>
+                        <a:rPr sz="1200" b="0">
+                          <a:solidFill>
+                            <a:srgbClr val="2B2B2B"/>
+                          </a:solidFill>
+                          <a:latin typeface="Microsoft YaHei"/>
+                          <a:ea typeface="Microsoft YaHei"/>
+                          <a:cs typeface="Microsoft YaHei"/>
+                        </a:rPr>
+                        <a:t>9</a:t>
+                      </a:r>
+                    </a:p>
+                  </a:txBody>
+                  <a:tcPr marL="73152" marR="73152" anchor="ctr">
+                    <a:solidFill>
+                      <a:srgbClr val="E8EEF6"/>
+                    </a:solidFill>
+                  </a:tcPr>
+                </a:tc>
+              </a:tr>
+              <a:tr h="301752">
+                <a:tc>
+                  <a:txBody>
+                    <a:bodyPr/>
+                    <a:lstStyle/>
+                    <a:p>
+                      <a:r>
+                        <a:rPr sz="1200" b="0">
+                          <a:solidFill>
+                            <a:srgbClr val="2B2B2B"/>
+                          </a:solidFill>
+                          <a:latin typeface="Microsoft YaHei"/>
+                          <a:ea typeface="Microsoft YaHei"/>
+                          <a:cs typeface="Microsoft YaHei"/>
+                        </a:rPr>
+                        <a:t>strings</a:t>
+                      </a:r>
+                    </a:p>
+                  </a:txBody>
+                  <a:tcPr marL="73152" marR="73152" anchor="ctr">
+                    <a:solidFill>
+                      <a:srgbClr val="FFFFFF"/>
+                    </a:solidFill>
+                  </a:tcPr>
+                </a:tc>
+                <a:tc>
+                  <a:txBody>
+                    <a:bodyPr/>
+                    <a:lstStyle/>
+                    <a:p>
+                      <a:r>
+                        <a:rPr sz="1200" b="0">
+                          <a:solidFill>
+                            <a:srgbClr val="2B2B2B"/>
+                          </a:solidFill>
+                          <a:latin typeface="Microsoft YaHei"/>
+                          <a:ea typeface="Microsoft YaHei"/>
+                          <a:cs typeface="Microsoft YaHei"/>
+                        </a:rPr>
+                        <a:t>18</a:t>
+                      </a:r>
+                    </a:p>
+                  </a:txBody>
+                  <a:tcPr marL="73152" marR="73152" anchor="ctr">
+                    <a:solidFill>
+                      <a:srgbClr val="FFFFFF"/>
+                    </a:solidFill>
+                  </a:tcPr>
+                </a:tc>
+                <a:tc>
+                  <a:txBody>
+                    <a:bodyPr/>
+                    <a:lstStyle/>
+                    <a:p>
+                      <a:r>
+                        <a:rPr sz="1200" b="0">
+                          <a:solidFill>
+                            <a:srgbClr val="2B2B2B"/>
+                          </a:solidFill>
+                          <a:latin typeface="Microsoft YaHei"/>
+                          <a:ea typeface="Microsoft YaHei"/>
+                          <a:cs typeface="Microsoft YaHei"/>
+                        </a:rPr>
+                        <a:t>cli</a:t>
+                      </a:r>
+                    </a:p>
+                  </a:txBody>
+                  <a:tcPr marL="73152" marR="73152" anchor="ctr">
+                    <a:solidFill>
+                      <a:srgbClr val="FFFFFF"/>
+                    </a:solidFill>
+                  </a:tcPr>
+                </a:tc>
+                <a:tc>
+                  <a:txBody>
+                    <a:bodyPr/>
+                    <a:lstStyle/>
+                    <a:p>
+                      <a:r>
+                        <a:rPr sz="1200" b="0">
+                          <a:solidFill>
+                            <a:srgbClr val="2B2B2B"/>
+                          </a:solidFill>
+                          <a:latin typeface="Microsoft YaHei"/>
+                          <a:ea typeface="Microsoft YaHei"/>
+                          <a:cs typeface="Microsoft YaHei"/>
+                        </a:rPr>
+                        <a:t>5</a:t>
+                      </a:r>
+                    </a:p>
+                  </a:txBody>
+                  <a:tcPr marL="73152" marR="73152" anchor="ctr">
+                    <a:solidFill>
+                      <a:srgbClr val="FFFFFF"/>
+                    </a:solidFill>
+                  </a:tcPr>
+                </a:tc>
+              </a:tr>
+              <a:tr h="301752">
+                <a:tc>
+                  <a:txBody>
+                    <a:bodyPr/>
+                    <a:lstStyle/>
+                    <a:p>
+                      <a:r>
+                        <a:rPr sz="1200" b="0">
+                          <a:solidFill>
+                            <a:srgbClr val="2B2B2B"/>
+                          </a:solidFill>
+                          <a:latin typeface="Microsoft YaHei"/>
+                          <a:ea typeface="Microsoft YaHei"/>
+                          <a:cs typeface="Microsoft YaHei"/>
+                        </a:rPr>
+                        <a:t>types</a:t>
+                      </a:r>
+                    </a:p>
+                  </a:txBody>
+                  <a:tcPr marL="73152" marR="73152" anchor="ctr">
+                    <a:solidFill>
+                      <a:srgbClr val="E8EEF6"/>
+                    </a:solidFill>
+                  </a:tcPr>
+                </a:tc>
+                <a:tc>
+                  <a:txBody>
+                    <a:bodyPr/>
+                    <a:lstStyle/>
+                    <a:p>
+                      <a:r>
+                        <a:rPr sz="1200" b="0">
+                          <a:solidFill>
+                            <a:srgbClr val="2B2B2B"/>
+                          </a:solidFill>
+                          <a:latin typeface="Microsoft YaHei"/>
+                          <a:ea typeface="Microsoft YaHei"/>
+                          <a:cs typeface="Microsoft YaHei"/>
+                        </a:rPr>
+                        <a:t>17</a:t>
+                      </a:r>
+                    </a:p>
+                  </a:txBody>
+                  <a:tcPr marL="73152" marR="73152" anchor="ctr">
+                    <a:solidFill>
+                      <a:srgbClr val="E8EEF6"/>
+                    </a:solidFill>
+                  </a:tcPr>
+                </a:tc>
+                <a:tc>
+                  <a:txBody>
+                    <a:bodyPr/>
+                    <a:lstStyle/>
+                    <a:p>
+                      <a:r>
+                        <a:rPr sz="1200" b="0">
+                          <a:solidFill>
+                            <a:srgbClr val="2B2B2B"/>
+                          </a:solidFill>
+                          <a:latin typeface="Microsoft YaHei"/>
+                          <a:ea typeface="Microsoft YaHei"/>
+                          <a:cs typeface="Microsoft YaHei"/>
+                        </a:rPr>
                         <a:t>smoke</a:t>
                       </a:r>
                     </a:p>
@@ -5628,7 +6216,7 @@
         </p:nvSpPr>
         <p:spPr>
           <a:xfrm>
-            <a:off x="5943600" y="3108960"/>
+            <a:off x="5943600" y="4919472"/>
             <a:ext cx="5760720" cy="1097280"/>
           </a:xfrm>
           <a:prstGeom prst="rect">
@@ -5656,7 +6244,43 @@
                 <a:ea typeface="Microsoft YaHei"/>
                 <a:cs typeface="Microsoft YaHei"/>
               </a:rPr>
-              <a:t>待测试完成后填写</a:t>
+              <a:t>普通模式 327/327 通过，约 25 秒</a:t>
+            </a:r>
+          </a:p>
+          <a:p>
+            <a:pPr algn="l">
+              <a:lnSpc>
+                <a:spcPct val="115000"/>
+              </a:lnSpc>
+            </a:pPr>
+            <a:r>
+              <a:rPr sz="1300" b="1">
+                <a:solidFill>
+                  <a:srgbClr val="1F4E8C"/>
+                </a:solidFill>
+                <a:latin typeface="Microsoft YaHei"/>
+                <a:ea typeface="Microsoft YaHei"/>
+                <a:cs typeface="Microsoft YaHei"/>
+              </a:rPr>
+              <a:t>GC 压力模式（每次分配都回收）全部通过</a:t>
+            </a:r>
+          </a:p>
+          <a:p>
+            <a:pPr algn="l">
+              <a:lnSpc>
+                <a:spcPct val="115000"/>
+              </a:lnSpc>
+            </a:pPr>
+            <a:r>
+              <a:rPr sz="1300" b="1">
+                <a:solidFill>
+                  <a:srgbClr val="1F4E8C"/>
+                </a:solidFill>
+                <a:latin typeface="Microsoft YaHei"/>
+                <a:ea typeface="Microsoft YaHei"/>
+                <a:cs typeface="Microsoft YaHei"/>
+              </a:rPr>
+              <a:t>gcov 行覆盖率 94.4%</a:t>
             </a:r>
           </a:p>
         </p:txBody>
@@ -5800,7 +6424,7 @@
                 <a:ea typeface="Microsoft YaHei"/>
                 <a:cs typeface="Microsoft YaHei"/>
               </a:rPr>
-              <a:t>9 组功能相同的脚本，输出逐字校验一致；每项运行 3 次取中位数（含进程启动）</a:t>
+              <a:t>9 组功能相同的脚本，输出逐字校验一致；每项运行 5 次取中位数（含进程启动）</a:t>
             </a:r>
           </a:p>
         </p:txBody>
@@ -6072,7 +6696,7 @@
                           <a:ea typeface="Microsoft YaHei"/>
                           <a:cs typeface="Microsoft YaHei"/>
                         </a:rPr>
-                        <a:t>0.152s</a:t>
+                        <a:t>0.169s</a:t>
                       </a:r>
                     </a:p>
                   </a:txBody>
@@ -6096,7 +6720,7 @@
                           <a:ea typeface="Microsoft YaHei"/>
                           <a:cs typeface="Microsoft YaHei"/>
                         </a:rPr>
-                        <a:t>0.213s</a:t>
+                        <a:t>0.242s</a:t>
                       </a:r>
                     </a:p>
                   </a:txBody>
@@ -6120,7 +6744,7 @@
                           <a:ea typeface="Microsoft YaHei"/>
                           <a:cs typeface="Microsoft YaHei"/>
                         </a:rPr>
-                        <a:t>1.40x</a:t>
+                        <a:t>1.43x</a:t>
                       </a:r>
                     </a:p>
                   </a:txBody>
@@ -6170,7 +6794,7 @@
                           <a:ea typeface="Microsoft YaHei"/>
                           <a:cs typeface="Microsoft YaHei"/>
                         </a:rPr>
-                        <a:t>0.205s</a:t>
+                        <a:t>0.213s</a:t>
                       </a:r>
                     </a:p>
                   </a:txBody>
@@ -6194,7 +6818,7 @@
                           <a:ea typeface="Microsoft YaHei"/>
                           <a:cs typeface="Microsoft YaHei"/>
                         </a:rPr>
-                        <a:t>0.262s</a:t>
+                        <a:t>0.293s</a:t>
                       </a:r>
                     </a:p>
                   </a:txBody>
@@ -6218,7 +6842,7 @@
                           <a:ea typeface="Microsoft YaHei"/>
                           <a:cs typeface="Microsoft YaHei"/>
                         </a:rPr>
-                        <a:t>1.28x</a:t>
+                        <a:t>1.38x</a:t>
                       </a:r>
                     </a:p>
                   </a:txBody>
@@ -6268,7 +6892,7 @@
                           <a:ea typeface="Microsoft YaHei"/>
                           <a:cs typeface="Microsoft YaHei"/>
                         </a:rPr>
-                        <a:t>0.107s</a:t>
+                        <a:t>0.120s</a:t>
                       </a:r>
                     </a:p>
                   </a:txBody>
@@ -6292,7 +6916,7 @@
                           <a:ea typeface="Microsoft YaHei"/>
                           <a:cs typeface="Microsoft YaHei"/>
                         </a:rPr>
-                        <a:t>0.396s</a:t>
+                        <a:t>0.451s</a:t>
                       </a:r>
                     </a:p>
                   </a:txBody>
@@ -6316,7 +6940,7 @@
                           <a:ea typeface="Microsoft YaHei"/>
                           <a:cs typeface="Microsoft YaHei"/>
                         </a:rPr>
-                        <a:t>3.69x</a:t>
+                        <a:t>3.77x</a:t>
                       </a:r>
                     </a:p>
                   </a:txBody>
@@ -6366,7 +6990,7 @@
                           <a:ea typeface="Microsoft YaHei"/>
                           <a:cs typeface="Microsoft YaHei"/>
                         </a:rPr>
-                        <a:t>0.076s</a:t>
+                        <a:t>0.082s</a:t>
                       </a:r>
                     </a:p>
                   </a:txBody>
@@ -6390,7 +7014,7 @@
                           <a:ea typeface="Microsoft YaHei"/>
                           <a:cs typeface="Microsoft YaHei"/>
                         </a:rPr>
-                        <a:t>0.139s</a:t>
+                        <a:t>0.150s</a:t>
                       </a:r>
                     </a:p>
                   </a:txBody>
@@ -6414,7 +7038,7 @@
                           <a:ea typeface="Microsoft YaHei"/>
                           <a:cs typeface="Microsoft YaHei"/>
                         </a:rPr>
-                        <a:t>1.83x</a:t>
+                        <a:t>1.82x</a:t>
                       </a:r>
                     </a:p>
                   </a:txBody>
@@ -6464,7 +7088,7 @@
                           <a:ea typeface="Microsoft YaHei"/>
                           <a:cs typeface="Microsoft YaHei"/>
                         </a:rPr>
-                        <a:t>0.311s</a:t>
+                        <a:t>0.331s</a:t>
                       </a:r>
                     </a:p>
                   </a:txBody>
@@ -6488,7 +7112,7 @@
                           <a:ea typeface="Microsoft YaHei"/>
                           <a:cs typeface="Microsoft YaHei"/>
                         </a:rPr>
-                        <a:t>0.494s</a:t>
+                        <a:t>0.519s</a:t>
                       </a:r>
                     </a:p>
                   </a:txBody>
@@ -6512,7 +7136,7 @@
                           <a:ea typeface="Microsoft YaHei"/>
                           <a:cs typeface="Microsoft YaHei"/>
                         </a:rPr>
-                        <a:t>1.58x</a:t>
+                        <a:t>1.57x</a:t>
                       </a:r>
                     </a:p>
                   </a:txBody>
@@ -6562,7 +7186,7 @@
                           <a:ea typeface="Microsoft YaHei"/>
                           <a:cs typeface="Microsoft YaHei"/>
                         </a:rPr>
-                        <a:t>0.322s</a:t>
+                        <a:t>0.326s</a:t>
                       </a:r>
                     </a:p>
                   </a:txBody>
@@ -6586,7 +7210,7 @@
                           <a:ea typeface="Microsoft YaHei"/>
                           <a:cs typeface="Microsoft YaHei"/>
                         </a:rPr>
-                        <a:t>0.554s</a:t>
+                        <a:t>0.612s</a:t>
                       </a:r>
                     </a:p>
                   </a:txBody>
@@ -6610,7 +7234,7 @@
                           <a:ea typeface="Microsoft YaHei"/>
                           <a:cs typeface="Microsoft YaHei"/>
                         </a:rPr>
-                        <a:t>1.72x</a:t>
+                        <a:t>1.88x</a:t>
                       </a:r>
                     </a:p>
                   </a:txBody>
@@ -6660,7 +7284,7 @@
                           <a:ea typeface="Microsoft YaHei"/>
                           <a:cs typeface="Microsoft YaHei"/>
                         </a:rPr>
-                        <a:t>0.478s</a:t>
+                        <a:t>0.479s</a:t>
                       </a:r>
                     </a:p>
                   </a:txBody>
@@ -6684,7 +7308,7 @@
                           <a:ea typeface="Microsoft YaHei"/>
                           <a:cs typeface="Microsoft YaHei"/>
                         </a:rPr>
-                        <a:t>1.136s</a:t>
+                        <a:t>1.065s</a:t>
                       </a:r>
                     </a:p>
                   </a:txBody>
@@ -6708,7 +7332,7 @@
                           <a:ea typeface="Microsoft YaHei"/>
                           <a:cs typeface="Microsoft YaHei"/>
                         </a:rPr>
-                        <a:t>2.38x</a:t>
+                        <a:t>2.22x</a:t>
                       </a:r>
                     </a:p>
                   </a:txBody>
@@ -6758,7 +7382,7 @@
                           <a:ea typeface="Microsoft YaHei"/>
                           <a:cs typeface="Microsoft YaHei"/>
                         </a:rPr>
-                        <a:t>0.590s</a:t>
+                        <a:t>0.561s</a:t>
                       </a:r>
                     </a:p>
                   </a:txBody>
@@ -6782,7 +7406,7 @@
                           <a:ea typeface="Microsoft YaHei"/>
                           <a:cs typeface="Microsoft YaHei"/>
                         </a:rPr>
-                        <a:t>0.110s</a:t>
+                        <a:t>0.129s</a:t>
                       </a:r>
                     </a:p>
                   </a:txBody>
@@ -6806,7 +7430,7 @@
                           <a:ea typeface="Microsoft YaHei"/>
                           <a:cs typeface="Microsoft YaHei"/>
                         </a:rPr>
-                        <a:t>0.19x</a:t>
+                        <a:t>0.23x</a:t>
                       </a:r>
                     </a:p>
                   </a:txBody>
@@ -6856,7 +7480,7 @@
                           <a:ea typeface="Microsoft YaHei"/>
                           <a:cs typeface="Microsoft YaHei"/>
                         </a:rPr>
-                        <a:t>0.165s</a:t>
+                        <a:t>0.177s</a:t>
                       </a:r>
                     </a:p>
                   </a:txBody>
@@ -6880,7 +7504,7 @@
                           <a:ea typeface="Microsoft YaHei"/>
                           <a:cs typeface="Microsoft YaHei"/>
                         </a:rPr>
-                        <a:t>0.191s</a:t>
+                        <a:t>0.237s</a:t>
                       </a:r>
                     </a:p>
                   </a:txBody>
@@ -6904,7 +7528,7 @@
                           <a:ea typeface="Microsoft YaHei"/>
                           <a:cs typeface="Microsoft YaHei"/>
                         </a:rPr>
-                        <a:t>1.16x</a:t>
+                        <a:t>1.34x</a:t>
                       </a:r>
                     </a:p>
                   </a:txBody>
@@ -7002,7 +7626,7 @@
                           <a:ea typeface="Microsoft YaHei"/>
                           <a:cs typeface="Microsoft YaHei"/>
                         </a:rPr>
-                        <a:t>1.37x</a:t>
+                        <a:t>1.44x</a:t>
                       </a:r>
                     </a:p>
                   </a:txBody>
@@ -7438,7 +8062,7 @@
                 <a:ea typeface="Microsoft YaHei"/>
                 <a:cs typeface="Microsoft YaHei"/>
               </a:rPr>
-              <a:t>数值 for 循环用专用指令，不创建迭代器对象：loop 用例快 3.7 倍</a:t>
+              <a:t>数值 for 循环用专用指令，不创建迭代器对象：loop 用例快 3.8 倍</a:t>
             </a:r>
           </a:p>
           <a:p>
@@ -7467,7 +8091,7 @@
                 <a:ea typeface="Microsoft YaHei"/>
                 <a:cs typeface="Microsoft YaHei"/>
               </a:rPr>
-              <a:t>computed goto 分派 + 调用快速路径：fib 用例快 1.3 倍</a:t>
+              <a:t>computed goto 分派 + 调用快速路径：fib 用例快 1.4 倍</a:t>
             </a:r>
           </a:p>
           <a:p>
@@ -7679,7 +8303,7 @@
                 <a:ea typeface="Microsoft YaHei"/>
                 <a:cs typeface="Microsoft YaHei"/>
               </a:rPr>
-              <a:t>--stats 显示 GC 占 37%，累计分配 424MB</a:t>
+              <a:t>--stats 显示 GC 占 36%，累计分配 424MB</a:t>
             </a:r>
           </a:p>
           <a:p>
@@ -8125,7 +8749,7 @@
                           <a:ea typeface="Microsoft YaHei"/>
                           <a:cs typeface="Microsoft YaHei"/>
                         </a:rPr>
-                        <a:t>Claude Code 技能：语法速览 + 15 条与 Python/JS 的差异</a:t>
+                        <a:t>Claude Code 技能：语法速览 + 18 条与 Python/JS 的差异</a:t>
                       </a:r>
                     </a:p>
                   </a:txBody>
@@ -8712,7 +9336,7 @@
                 <a:ea typeface="Microsoft YaHei"/>
                 <a:cs typeface="Microsoft YaHei"/>
               </a:rPr>
-              <a:t>待应用完成后填写</a:t>
+              <a:t>一个只读过 Skill 文档、没看过解释器源码的 Agent 独立开发：925 行 GZG，5 次阶段性提交</a:t>
             </a:r>
           </a:p>
         </p:txBody>
@@ -8881,7 +9505,241 @@
                 <a:ea typeface="Microsoft YaHei"/>
                 <a:cs typeface="Consolas"/>
               </a:rPr>
-              <a:t>待应用完成后填写</a:t>
+              <a:t>$ gzg apps/game2048/main.gzg --auto --fast --seed 3</a:t>
+            </a:r>
+          </a:p>
+          <a:p>
+            <a:pPr algn="l">
+              <a:lnSpc>
+                <a:spcPct val="100000"/>
+              </a:lnSpc>
+            </a:pPr>
+            <a:r>
+              <a:rPr sz="1300" b="0">
+                <a:solidFill>
+                  <a:srgbClr val="2B2B2B"/>
+                </a:solidFill>
+                <a:latin typeface="Consolas"/>
+                <a:ea typeface="Microsoft YaHei"/>
+                <a:cs typeface="Consolas"/>
+              </a:rPr>
+              <a:t>+-------+-------+-------+-------+</a:t>
+            </a:r>
+          </a:p>
+          <a:p>
+            <a:pPr algn="l">
+              <a:lnSpc>
+                <a:spcPct val="100000"/>
+              </a:lnSpc>
+            </a:pPr>
+            <a:r>
+              <a:rPr sz="1300" b="0">
+                <a:solidFill>
+                  <a:srgbClr val="2B2B2B"/>
+                </a:solidFill>
+                <a:latin typeface="Consolas"/>
+                <a:ea typeface="Microsoft YaHei"/>
+                <a:cs typeface="Consolas"/>
+              </a:rPr>
+              <a:t>| 16384 | 4096  |  512  |   2   |</a:t>
+            </a:r>
+          </a:p>
+          <a:p>
+            <a:pPr algn="l">
+              <a:lnSpc>
+                <a:spcPct val="100000"/>
+              </a:lnSpc>
+            </a:pPr>
+            <a:r>
+              <a:rPr sz="1300" b="0">
+                <a:solidFill>
+                  <a:srgbClr val="2B2B2B"/>
+                </a:solidFill>
+                <a:latin typeface="Consolas"/>
+                <a:ea typeface="Microsoft YaHei"/>
+                <a:cs typeface="Consolas"/>
+              </a:rPr>
+              <a:t>+-------+-------+-------+-------+</a:t>
+            </a:r>
+          </a:p>
+          <a:p>
+            <a:pPr algn="l">
+              <a:lnSpc>
+                <a:spcPct val="100000"/>
+              </a:lnSpc>
+            </a:pPr>
+            <a:r>
+              <a:rPr sz="1300" b="0">
+                <a:solidFill>
+                  <a:srgbClr val="2B2B2B"/>
+                </a:solidFill>
+                <a:latin typeface="Consolas"/>
+                <a:ea typeface="Microsoft YaHei"/>
+                <a:cs typeface="Consolas"/>
+              </a:rPr>
+              <a:t>| 2048  | 1024  |  256  |   8   |</a:t>
+            </a:r>
+          </a:p>
+          <a:p>
+            <a:pPr algn="l">
+              <a:lnSpc>
+                <a:spcPct val="100000"/>
+              </a:lnSpc>
+            </a:pPr>
+            <a:r>
+              <a:rPr sz="1300" b="0">
+                <a:solidFill>
+                  <a:srgbClr val="2B2B2B"/>
+                </a:solidFill>
+                <a:latin typeface="Consolas"/>
+                <a:ea typeface="Microsoft YaHei"/>
+                <a:cs typeface="Consolas"/>
+              </a:rPr>
+              <a:t>+-------+-------+-------+-------+</a:t>
+            </a:r>
+          </a:p>
+          <a:p>
+            <a:pPr algn="l">
+              <a:lnSpc>
+                <a:spcPct val="100000"/>
+              </a:lnSpc>
+            </a:pPr>
+            <a:r>
+              <a:rPr sz="1300" b="0">
+                <a:solidFill>
+                  <a:srgbClr val="2B2B2B"/>
+                </a:solidFill>
+                <a:latin typeface="Consolas"/>
+                <a:ea typeface="Microsoft YaHei"/>
+                <a:cs typeface="Consolas"/>
+              </a:rPr>
+              <a:t>|  128  |  64   |  32   |   4   |</a:t>
+            </a:r>
+          </a:p>
+          <a:p>
+            <a:pPr algn="l">
+              <a:lnSpc>
+                <a:spcPct val="100000"/>
+              </a:lnSpc>
+            </a:pPr>
+            <a:r>
+              <a:rPr sz="1300" b="0">
+                <a:solidFill>
+                  <a:srgbClr val="2B2B2B"/>
+                </a:solidFill>
+                <a:latin typeface="Consolas"/>
+                <a:ea typeface="Microsoft YaHei"/>
+                <a:cs typeface="Consolas"/>
+              </a:rPr>
+              <a:t>+-------+-------+-------+-------+</a:t>
+            </a:r>
+          </a:p>
+          <a:p>
+            <a:pPr algn="l">
+              <a:lnSpc>
+                <a:spcPct val="100000"/>
+              </a:lnSpc>
+            </a:pPr>
+            <a:r>
+              <a:rPr sz="1300" b="0">
+                <a:solidFill>
+                  <a:srgbClr val="2B2B2B"/>
+                </a:solidFill>
+                <a:latin typeface="Consolas"/>
+                <a:ea typeface="Microsoft YaHei"/>
+                <a:cs typeface="Consolas"/>
+              </a:rPr>
+              <a:t>|   4   |   8   |  16   |   2   |</a:t>
+            </a:r>
+          </a:p>
+          <a:p>
+            <a:pPr algn="l">
+              <a:lnSpc>
+                <a:spcPct val="100000"/>
+              </a:lnSpc>
+            </a:pPr>
+            <a:r>
+              <a:rPr sz="1300" b="0">
+                <a:solidFill>
+                  <a:srgbClr val="2B2B2B"/>
+                </a:solidFill>
+                <a:latin typeface="Consolas"/>
+                <a:ea typeface="Microsoft YaHei"/>
+                <a:cs typeface="Consolas"/>
+              </a:rPr>
+              <a:t>+-------+-------+-------+-------+</a:t>
+            </a:r>
+          </a:p>
+          <a:p>
+            <a:pPr algn="l">
+              <a:lnSpc>
+                <a:spcPct val="100000"/>
+              </a:lnSpc>
+            </a:pPr>
+            <a:r>
+              <a:rPr sz="1300" b="0">
+                <a:solidFill>
+                  <a:srgbClr val="2B2B2B"/>
+                </a:solidFill>
+                <a:latin typeface="Consolas"/>
+                <a:ea typeface="Microsoft YaHei"/>
+                <a:cs typeface="Consolas"/>
+              </a:rPr>
+              <a:t>最终分数: 290724</a:t>
+            </a:r>
+          </a:p>
+          <a:p>
+            <a:pPr algn="l">
+              <a:lnSpc>
+                <a:spcPct val="100000"/>
+              </a:lnSpc>
+            </a:pPr>
+            <a:r>
+              <a:rPr sz="1300" b="0">
+                <a:solidFill>
+                  <a:srgbClr val="2B2B2B"/>
+                </a:solidFill>
+                <a:latin typeface="Consolas"/>
+                <a:ea typeface="Microsoft YaHei"/>
+                <a:cs typeface="Consolas"/>
+              </a:rPr>
+              <a:t>最大块: 16384</a:t>
+            </a:r>
+          </a:p>
+          <a:p>
+            <a:pPr algn="l">
+              <a:lnSpc>
+                <a:spcPct val="100000"/>
+              </a:lnSpc>
+            </a:pPr>
+            <a:r>
+              <a:rPr sz="1300" b="0">
+                <a:solidFill>
+                  <a:srgbClr val="2B2B2B"/>
+                </a:solidFill>
+                <a:latin typeface="Consolas"/>
+                <a:ea typeface="Microsoft YaHei"/>
+                <a:cs typeface="Consolas"/>
+              </a:rPr>
+              <a:t>步数: 11239</a:t>
+            </a:r>
+          </a:p>
+          <a:p>
+            <a:pPr algn="l">
+              <a:lnSpc>
+                <a:spcPct val="100000"/>
+              </a:lnSpc>
+            </a:pPr>
+            <a:r>
+              <a:rPr sz="1300" b="0">
+                <a:solidFill>
+                  <a:srgbClr val="2B2B2B"/>
+                </a:solidFill>
+                <a:latin typeface="Consolas"/>
+                <a:ea typeface="Microsoft YaHei"/>
+                <a:cs typeface="Consolas"/>
+              </a:rPr>
+              <a:t>结果: 胜利（达成 2048）</a:t>
             </a:r>
           </a:p>
         </p:txBody>
@@ -8914,6 +9772,17 @@
               </a:lnSpc>
             </a:pPr>
             <a:r>
+              <a:rPr sz="900" b="0">
+                <a:solidFill>
+                  <a:srgbClr val="1F4E8C"/>
+                </a:solidFill>
+                <a:latin typeface="Microsoft YaHei"/>
+                <a:ea typeface="Microsoft YaHei"/>
+                <a:cs typeface="Microsoft YaHei"/>
+              </a:rPr>
+              <a:t>■  </a:t>
+            </a:r>
+            <a:r>
               <a:rPr sz="1500" b="0">
                 <a:solidFill>
                   <a:srgbClr val="2B2B2B"/>
@@ -8922,7 +9791,152 @@
                 <a:ea typeface="Microsoft YaHei"/>
                 <a:cs typeface="Microsoft YaHei"/>
               </a:rPr>
-              <a:t>待应用完成后填写</a:t>
+              <a:t>4 个模块用 import 组织：board（纯逻辑）、ai、ui、main，另有 62 项断言的单元测试</a:t>
+            </a:r>
+          </a:p>
+          <a:p>
+            <a:pPr algn="l">
+              <a:lnSpc>
+                <a:spcPct val="135000"/>
+              </a:lnSpc>
+            </a:pPr>
+            <a:r>
+              <a:rPr sz="900" b="0">
+                <a:solidFill>
+                  <a:srgbClr val="1F4E8C"/>
+                </a:solidFill>
+                <a:latin typeface="Microsoft YaHei"/>
+                <a:ea typeface="Microsoft YaHei"/>
+                <a:cs typeface="Microsoft YaHei"/>
+              </a:rPr>
+              <a:t>■  </a:t>
+            </a:r>
+            <a:r>
+              <a:rPr sz="1500" b="0">
+                <a:solidFill>
+                  <a:srgbClr val="2B2B2B"/>
+                </a:solidFill>
+                <a:latin typeface="Microsoft YaHei"/>
+                <a:ea typeface="Microsoft YaHei"/>
+                <a:cs typeface="Microsoft YaHei"/>
+              </a:rPr>
+              <a:t>交互：wasd / 方向词 / 中文“上下左右”，多步撤销、重来、帮助，ANSI 256 色</a:t>
+            </a:r>
+          </a:p>
+          <a:p>
+            <a:pPr algn="l">
+              <a:lnSpc>
+                <a:spcPct val="135000"/>
+              </a:lnSpc>
+            </a:pPr>
+            <a:r>
+              <a:rPr sz="900" b="0">
+                <a:solidFill>
+                  <a:srgbClr val="1F4E8C"/>
+                </a:solidFill>
+                <a:latin typeface="Microsoft YaHei"/>
+                <a:ea typeface="Microsoft YaHei"/>
+                <a:cs typeface="Microsoft YaHei"/>
+              </a:rPr>
+              <a:t>■  </a:t>
+            </a:r>
+            <a:r>
+              <a:rPr sz="1500" b="0">
+                <a:solidFill>
+                  <a:srgbClr val="2B2B2B"/>
+                </a:solidFill>
+                <a:latin typeface="Microsoft YaHei"/>
+                <a:ea typeface="Microsoft YaHei"/>
+                <a:cs typeface="Microsoft YaHei"/>
+              </a:rPr>
+              <a:t>AI：Expectimax，按空格数调整深度；线评估缓存 + 置换表，每步 1.3s → 0.13s</a:t>
+            </a:r>
+          </a:p>
+          <a:p>
+            <a:pPr algn="l">
+              <a:lnSpc>
+                <a:spcPct val="135000"/>
+              </a:lnSpc>
+            </a:pPr>
+            <a:r>
+              <a:rPr sz="900" b="0">
+                <a:solidFill>
+                  <a:srgbClr val="1F4E8C"/>
+                </a:solidFill>
+                <a:latin typeface="Microsoft YaHei"/>
+                <a:ea typeface="Microsoft YaHei"/>
+                <a:cs typeface="Microsoft YaHei"/>
+              </a:rPr>
+              <a:t>■  </a:t>
+            </a:r>
+            <a:r>
+              <a:rPr sz="1500" b="0">
+                <a:solidFill>
+                  <a:srgbClr val="2B2B2B"/>
+                </a:solidFill>
+                <a:latin typeface="Microsoft YaHei"/>
+                <a:ea typeface="Microsoft YaHei"/>
+                <a:cs typeface="Microsoft YaHei"/>
+              </a:rPr>
+              <a:t>6 个种子全部达成 2048：最差 4096，最好 16384（seed 3，290724 分）</a:t>
+            </a:r>
+          </a:p>
+          <a:p>
+            <a:pPr algn="l">
+              <a:lnSpc>
+                <a:spcPct val="135000"/>
+              </a:lnSpc>
+            </a:pPr>
+            <a:r>
+              <a:rPr sz="900" b="0">
+                <a:solidFill>
+                  <a:srgbClr val="1F4E8C"/>
+                </a:solidFill>
+                <a:latin typeface="Microsoft YaHei"/>
+                <a:ea typeface="Microsoft YaHei"/>
+                <a:cs typeface="Microsoft YaHei"/>
+              </a:rPr>
+              <a:t>■  </a:t>
+            </a:r>
+            <a:r>
+              <a:rPr sz="1500" b="0">
+                <a:solidFill>
+                  <a:srgbClr val="2B2B2B"/>
+                </a:solidFill>
+                <a:latin typeface="Microsoft YaHei"/>
+                <a:ea typeface="Microsoft YaHei"/>
+                <a:cs typeface="Microsoft YaHei"/>
+              </a:rPr>
+              <a:t>--seed 固定随机数，moves.txt 重放两次输出逐字节相同；输入结束时正常退出</a:t>
+            </a:r>
+          </a:p>
+          <a:p>
+            <a:pPr algn="l">
+              <a:lnSpc>
+                <a:spcPct val="135000"/>
+              </a:lnSpc>
+            </a:pPr>
+            <a:r>
+              <a:rPr sz="900" b="0">
+                <a:solidFill>
+                  <a:srgbClr val="1F4E8C"/>
+                </a:solidFill>
+                <a:latin typeface="Microsoft YaHei"/>
+                <a:ea typeface="Microsoft YaHei"/>
+                <a:cs typeface="Microsoft YaHei"/>
+              </a:rPr>
+              <a:t>■  </a:t>
+            </a:r>
+            <a:r>
+              <a:rPr sz="1500" b="0">
+                <a:solidFill>
+                  <a:srgbClr val="2B2B2B"/>
+                </a:solidFill>
+                <a:latin typeface="Microsoft YaHei"/>
+                <a:ea typeface="Microsoft YaHei"/>
+                <a:cs typeface="Microsoft YaHei"/>
+              </a:rPr>
+              <a:t>开发报错仅 2 次（语法 1、逻辑 1），另发现 1 个解释器 bug</a:t>
             </a:r>
           </a:p>
         </p:txBody>
@@ -9122,7 +10136,7 @@
         </p:nvGraphicFramePr>
         <p:xfrm>
           <a:off x="502920" y="1188720"/>
-          <a:ext cx="11155680" cy="1097280"/>
+          <a:ext cx="11155680" cy="3840480"/>
         </p:xfrm>
         <a:graphic>
           <a:graphicData uri="http://schemas.openxmlformats.org/drawingml/2006/table">
@@ -9224,7 +10238,7 @@
                           <a:ea typeface="Microsoft YaHei"/>
                           <a:cs typeface="Microsoft YaHei"/>
                         </a:rPr>
-                        <a:t>待填写</a:t>
+                        <a:t>按 Python 习惯写了 a if c else b，报“实参列表缺少 ')'”</a:t>
                       </a:r>
                     </a:p>
                   </a:txBody>
@@ -9248,7 +10262,7 @@
                           <a:ea typeface="Microsoft YaHei"/>
                           <a:cs typeface="Microsoft YaHei"/>
                         </a:rPr>
-                        <a:t/>
+                        <a:t>文档没写“没有这种写法”；报错没给出改法</a:t>
                       </a:r>
                     </a:p>
                   </a:txBody>
@@ -9272,7 +10286,7 @@
                           <a:ea typeface="Microsoft YaHei"/>
                           <a:cs typeface="Microsoft YaHei"/>
                         </a:rPr>
-                        <a:t/>
+                        <a:t>规则 4 写明只有 c ? a : b；编译器直接提示改写并抑制连带错误</a:t>
                       </a:r>
                     </a:p>
                   </a:txBody>
@@ -9283,6 +10297,376 @@
                   </a:tcPr>
                 </a:tc>
               </a:tr>
+              <a:tr h="548640">
+                <a:tc>
+                  <a:txBody>
+                    <a:bodyPr/>
+                    <a:lstStyle/>
+                    <a:p>
+                      <a:r>
+                        <a:rPr sz="1300" b="0">
+                          <a:solidFill>
+                            <a:srgbClr val="2B2B2B"/>
+                          </a:solidFill>
+                          <a:latin typeface="Microsoft YaHei"/>
+                          <a:ea typeface="Microsoft YaHei"/>
+                          <a:cs typeface="Microsoft YaHei"/>
+                        </a:rPr>
+                        <a:t>文档没提 import，只能靠试验摸清语法与路径规则</a:t>
+                      </a:r>
+                    </a:p>
+                  </a:txBody>
+                  <a:tcPr marL="73152" marR="73152" anchor="ctr">
+                    <a:solidFill>
+                      <a:srgbClr val="E8EEF6"/>
+                    </a:solidFill>
+                  </a:tcPr>
+                </a:tc>
+                <a:tc>
+                  <a:txBody>
+                    <a:bodyPr/>
+                    <a:lstStyle/>
+                    <a:p>
+                      <a:r>
+                        <a:rPr sz="1300" b="0">
+                          <a:solidFill>
+                            <a:srgbClr val="2B2B2B"/>
+                          </a:solidFill>
+                          <a:latin typeface="Microsoft YaHei"/>
+                          <a:ea typeface="Microsoft YaHei"/>
+                          <a:cs typeface="Microsoft YaHei"/>
+                        </a:rPr>
+                        <a:t>Skill 文档遗漏</a:t>
+                      </a:r>
+                    </a:p>
+                  </a:txBody>
+                  <a:tcPr marL="73152" marR="73152" anchor="ctr">
+                    <a:solidFill>
+                      <a:srgbClr val="E8EEF6"/>
+                    </a:solidFill>
+                  </a:tcPr>
+                </a:tc>
+                <a:tc>
+                  <a:txBody>
+                    <a:bodyPr/>
+                    <a:lstStyle/>
+                    <a:p>
+                      <a:r>
+                        <a:rPr sz="1300" b="0">
+                          <a:solidFill>
+                            <a:srgbClr val="2B2B2B"/>
+                          </a:solidFill>
+                          <a:latin typeface="Microsoft YaHei"/>
+                          <a:ea typeface="Microsoft YaHei"/>
+                          <a:cs typeface="Microsoft YaHei"/>
+                        </a:rPr>
+                        <a:t>新增规则 16：路径相对于写 import 的文件、无 as、只执行一次</a:t>
+                      </a:r>
+                    </a:p>
+                  </a:txBody>
+                  <a:tcPr marL="73152" marR="73152" anchor="ctr">
+                    <a:solidFill>
+                      <a:srgbClr val="E8EEF6"/>
+                    </a:solidFill>
+                  </a:tcPr>
+                </a:tc>
+              </a:tr>
+              <a:tr h="548640">
+                <a:tc>
+                  <a:txBody>
+                    <a:bodyPr/>
+                    <a:lstStyle/>
+                    <a:p>
+                      <a:r>
+                        <a:rPr sz="1300" b="0">
+                          <a:solidFill>
+                            <a:srgbClr val="2B2B2B"/>
+                          </a:solidFill>
+                          <a:latin typeface="Microsoft YaHei"/>
+                          <a:ea typeface="Microsoft YaHei"/>
+                          <a:cs typeface="Microsoft YaHei"/>
+                        </a:rPr>
+                        <a:t>文件读写路径相对工作目录，与 import 不一致</a:t>
+                      </a:r>
+                    </a:p>
+                  </a:txBody>
+                  <a:tcPr marL="73152" marR="73152" anchor="ctr">
+                    <a:solidFill>
+                      <a:srgbClr val="FFFFFF"/>
+                    </a:solidFill>
+                  </a:tcPr>
+                </a:tc>
+                <a:tc>
+                  <a:txBody>
+                    <a:bodyPr/>
+                    <a:lstStyle/>
+                    <a:p>
+                      <a:r>
+                        <a:rPr sz="1300" b="0">
+                          <a:solidFill>
+                            <a:srgbClr val="2B2B2B"/>
+                          </a:solidFill>
+                          <a:latin typeface="Microsoft YaHei"/>
+                          <a:ea typeface="Microsoft YaHei"/>
+                          <a:cs typeface="Microsoft YaHei"/>
+                        </a:rPr>
+                        <a:t>两种路径基准未说明</a:t>
+                      </a:r>
+                    </a:p>
+                  </a:txBody>
+                  <a:tcPr marL="73152" marR="73152" anchor="ctr">
+                    <a:solidFill>
+                      <a:srgbClr val="FFFFFF"/>
+                    </a:solidFill>
+                  </a:tcPr>
+                </a:tc>
+                <a:tc>
+                  <a:txBody>
+                    <a:bodyPr/>
+                    <a:lstStyle/>
+                    <a:p>
+                      <a:r>
+                        <a:rPr sz="1300" b="0">
+                          <a:solidFill>
+                            <a:srgbClr val="2B2B2B"/>
+                          </a:solidFill>
+                          <a:latin typeface="Microsoft YaHei"/>
+                          <a:ea typeface="Microsoft YaHei"/>
+                          <a:cs typeface="Microsoft YaHei"/>
+                        </a:rPr>
+                        <a:t>新增规则 17</a:t>
+                      </a:r>
+                    </a:p>
+                  </a:txBody>
+                  <a:tcPr marL="73152" marR="73152" anchor="ctr">
+                    <a:solidFill>
+                      <a:srgbClr val="FFFFFF"/>
+                    </a:solidFill>
+                  </a:tcPr>
+                </a:tc>
+              </a:tr>
+              <a:tr h="548640">
+                <a:tc>
+                  <a:txBody>
+                    <a:bodyPr/>
+                    <a:lstStyle/>
+                    <a:p>
+                      <a:r>
+                        <a:rPr sz="1300" b="0">
+                          <a:solidFill>
+                            <a:srgbClr val="2B2B2B"/>
+                          </a:solidFill>
+                          <a:latin typeface="Microsoft YaHei"/>
+                          <a:ea typeface="Microsoft YaHei"/>
+                          <a:cs typeface="Microsoft YaHei"/>
+                        </a:rPr>
+                        <a:t>不确定函数里给顶层变量赋值是否是改全局</a:t>
+                      </a:r>
+                    </a:p>
+                  </a:txBody>
+                  <a:tcPr marL="73152" marR="73152" anchor="ctr">
+                    <a:solidFill>
+                      <a:srgbClr val="E8EEF6"/>
+                    </a:solidFill>
+                  </a:tcPr>
+                </a:tc>
+                <a:tc>
+                  <a:txBody>
+                    <a:bodyPr/>
+                    <a:lstStyle/>
+                    <a:p>
+                      <a:r>
+                        <a:rPr sz="1300" b="0">
+                          <a:solidFill>
+                            <a:srgbClr val="2B2B2B"/>
+                          </a:solidFill>
+                          <a:latin typeface="Microsoft YaHei"/>
+                          <a:ea typeface="Microsoft YaHei"/>
+                          <a:cs typeface="Microsoft YaHei"/>
+                        </a:rPr>
+                        <a:t>规则 3 只说了 let</a:t>
+                      </a:r>
+                    </a:p>
+                  </a:txBody>
+                  <a:tcPr marL="73152" marR="73152" anchor="ctr">
+                    <a:solidFill>
+                      <a:srgbClr val="E8EEF6"/>
+                    </a:solidFill>
+                  </a:tcPr>
+                </a:tc>
+                <a:tc>
+                  <a:txBody>
+                    <a:bodyPr/>
+                    <a:lstStyle/>
+                    <a:p>
+                      <a:r>
+                        <a:rPr sz="1300" b="0">
+                          <a:solidFill>
+                            <a:srgbClr val="2B2B2B"/>
+                          </a:solidFill>
+                          <a:latin typeface="Microsoft YaHei"/>
+                          <a:ea typeface="Microsoft YaHei"/>
+                          <a:cs typeface="Microsoft YaHei"/>
+                        </a:rPr>
+                        <a:t>规则 3 补充：直接赋值即修改全局</a:t>
+                      </a:r>
+                    </a:p>
+                  </a:txBody>
+                  <a:tcPr marL="73152" marR="73152" anchor="ctr">
+                    <a:solidFill>
+                      <a:srgbClr val="E8EEF6"/>
+                    </a:solidFill>
+                  </a:tcPr>
+                </a:tc>
+              </a:tr>
+              <a:tr h="548640">
+                <a:tc>
+                  <a:txBody>
+                    <a:bodyPr/>
+                    <a:lstStyle/>
+                    <a:p>
+                      <a:r>
+                        <a:rPr sz="1300" b="0">
+                          <a:solidFill>
+                            <a:srgbClr val="2B2B2B"/>
+                          </a:solidFill>
+                          <a:latin typeface="Microsoft YaHei"/>
+                          <a:ea typeface="Microsoft YaHei"/>
+                          <a:cs typeface="Microsoft YaHei"/>
+                        </a:rPr>
+                        <a:t>第一版 AI 每步 1.3 秒，靠自测微基准定位</a:t>
+                      </a:r>
+                    </a:p>
+                  </a:txBody>
+                  <a:tcPr marL="73152" marR="73152" anchor="ctr">
+                    <a:solidFill>
+                      <a:srgbClr val="FFFFFF"/>
+                    </a:solidFill>
+                  </a:tcPr>
+                </a:tc>
+                <a:tc>
+                  <a:txBody>
+                    <a:bodyPr/>
+                    <a:lstStyle/>
+                    <a:p>
+                      <a:r>
+                        <a:rPr sz="1300" b="0">
+                          <a:solidFill>
+                            <a:srgbClr val="2B2B2B"/>
+                          </a:solidFill>
+                          <a:latin typeface="Microsoft YaHei"/>
+                          <a:ea typeface="Microsoft YaHei"/>
+                          <a:cs typeface="Microsoft YaHei"/>
+                        </a:rPr>
+                        <a:t>缺少“哪些操作贵”的指引</a:t>
+                      </a:r>
+                    </a:p>
+                  </a:txBody>
+                  <a:tcPr marL="73152" marR="73152" anchor="ctr">
+                    <a:solidFill>
+                      <a:srgbClr val="FFFFFF"/>
+                    </a:solidFill>
+                  </a:tcPr>
+                </a:tc>
+                <a:tc>
+                  <a:txBody>
+                    <a:bodyPr/>
+                    <a:lstStyle/>
+                    <a:p>
+                      <a:r>
+                        <a:rPr sz="1300" b="0">
+                          <a:solidFill>
+                            <a:srgbClr val="2B2B2B"/>
+                          </a:solidFill>
+                          <a:latin typeface="Microsoft YaHei"/>
+                          <a:ea typeface="Microsoft YaHei"/>
+                          <a:cs typeface="Microsoft YaHei"/>
+                        </a:rPr>
+                        <a:t>新增“性能提示”一节（整数键、copy、join）</a:t>
+                      </a:r>
+                    </a:p>
+                  </a:txBody>
+                  <a:tcPr marL="73152" marR="73152" anchor="ctr">
+                    <a:solidFill>
+                      <a:srgbClr val="FFFFFF"/>
+                    </a:solidFill>
+                  </a:tcPr>
+                </a:tc>
+              </a:tr>
+              <a:tr h="548640">
+                <a:tc>
+                  <a:txBody>
+                    <a:bodyPr/>
+                    <a:lstStyle/>
+                    <a:p>
+                      <a:r>
+                        <a:rPr sz="1300" b="0">
+                          <a:solidFill>
+                            <a:srgbClr val="2B2B2B"/>
+                          </a:solidFill>
+                          <a:latin typeface="Microsoft YaHei"/>
+                          <a:ea typeface="Microsoft YaHei"/>
+                          <a:cs typeface="Microsoft YaHei"/>
+                        </a:rPr>
+                        <a:t>结构体内语法错误后进程卡死不退出</a:t>
+                      </a:r>
+                    </a:p>
+                  </a:txBody>
+                  <a:tcPr marL="73152" marR="73152" anchor="ctr">
+                    <a:solidFill>
+                      <a:srgbClr val="E8EEF6"/>
+                    </a:solidFill>
+                  </a:tcPr>
+                </a:tc>
+                <a:tc>
+                  <a:txBody>
+                    <a:bodyPr/>
+                    <a:lstStyle/>
+                    <a:p>
+                      <a:r>
+                        <a:rPr sz="1300" b="0">
+                          <a:solidFill>
+                            <a:srgbClr val="2B2B2B"/>
+                          </a:solidFill>
+                          <a:latin typeface="Microsoft YaHei"/>
+                          <a:ea typeface="Microsoft YaHei"/>
+                          <a:cs typeface="Microsoft YaHei"/>
+                        </a:rPr>
+                        <a:t>解释器 bug（测试 Agent 也独立发现）</a:t>
+                      </a:r>
+                    </a:p>
+                  </a:txBody>
+                  <a:tcPr marL="73152" marR="73152" anchor="ctr">
+                    <a:solidFill>
+                      <a:srgbClr val="E8EEF6"/>
+                    </a:solidFill>
+                  </a:tcPr>
+                </a:tc>
+                <a:tc>
+                  <a:txBody>
+                    <a:bodyPr/>
+                    <a:lstStyle/>
+                    <a:p>
+                      <a:r>
+                        <a:rPr sz="1300" b="0">
+                          <a:solidFill>
+                            <a:srgbClr val="2B2B2B"/>
+                          </a:solidFill>
+                          <a:latin typeface="Microsoft YaHei"/>
+                          <a:ea typeface="Microsoft YaHei"/>
+                          <a:cs typeface="Microsoft YaHei"/>
+                        </a:rPr>
+                        <a:t>编译器出错后跳到下一个成员，已加回归测试</a:t>
+                      </a:r>
+                    </a:p>
+                  </a:txBody>
+                  <a:tcPr marL="73152" marR="73152" anchor="ctr">
+                    <a:solidFill>
+                      <a:srgbClr val="E8EEF6"/>
+                    </a:solidFill>
+                  </a:tcPr>
+                </a:tc>
+              </a:tr>
             </a:tbl>
           </a:graphicData>
         </a:graphic>
@@ -9295,7 +10679,7 @@
         </p:nvSpPr>
         <p:spPr>
           <a:xfrm>
-            <a:off x="502920" y="2468880"/>
+            <a:off x="502920" y="5212080"/>
             <a:ext cx="11155680" cy="914400"/>
           </a:xfrm>
           <a:prstGeom prst="rect">
@@ -9323,7 +10707,7 @@
                 <a:ea typeface="Microsoft YaHei"/>
                 <a:cs typeface="Microsoft YaHei"/>
               </a:rPr>
-              <a:t>待填写</a:t>
+              <a:t>全程使用修订前的文档，报错仅 2 次；Agent 指出的 4 处文档缺失已全部补进 SKILL.md（15 条 → 18 条规则 + 性能提示）</a:t>
             </a:r>
           </a:p>
         </p:txBody>
@@ -9706,6 +11090,204 @@
               <a:t>ff5383b docs: PPT 生成脚本（python-pptx，数据取自测试与性能结果）；示例对齐修正</a:t>
             </a:r>
           </a:p>
+          <a:p>
+            <a:pPr algn="l">
+              <a:lnSpc>
+                <a:spcPct val="100000"/>
+              </a:lnSpc>
+            </a:pPr>
+            <a:r>
+              <a:rPr sz="1200" b="0">
+                <a:solidFill>
+                  <a:srgbClr val="2B2B2B"/>
+                </a:solidFill>
+                <a:latin typeface="Consolas"/>
+                <a:ea typeface="Microsoft YaHei"/>
+                <a:cs typeface="Consolas"/>
+              </a:rPr>
+              <a:t>e38dd04 fix: 黑盒测试发现的 6 个问题</a:t>
+            </a:r>
+          </a:p>
+          <a:p>
+            <a:pPr algn="l">
+              <a:lnSpc>
+                <a:spcPct val="100000"/>
+              </a:lnSpc>
+            </a:pPr>
+            <a:r>
+              <a:rPr sz="1200" b="0">
+                <a:solidFill>
+                  <a:srgbClr val="2B2B2B"/>
+                </a:solidFill>
+                <a:latin typeface="Consolas"/>
+                <a:ea typeface="Microsoft YaHei"/>
+                <a:cs typeface="Consolas"/>
+              </a:rPr>
+              <a:t>c403dfc tests: 321 个黑盒测试（18 个分类）；fix: 深层回调与 to_str 递归的 C 栈溢出、深比较与打印的…</a:t>
+            </a:r>
+          </a:p>
+          <a:p>
+            <a:pPr algn="l">
+              <a:lnSpc>
+                <a:spcPct val="100000"/>
+              </a:lnSpc>
+            </a:pPr>
+            <a:r>
+              <a:rPr sz="1200" b="0">
+                <a:solidFill>
+                  <a:srgbClr val="2B2B2B"/>
+                </a:solidFill>
+                <a:latin typeface="Consolas"/>
+                <a:ea typeface="Microsoft YaHei"/>
+                <a:cs typeface="Consolas"/>
+              </a:rPr>
+              <a:t>805fbd7 tests: .in 输入文件不做换行符转换（保留 CRLF 用例）</a:t>
+            </a:r>
+          </a:p>
+          <a:p>
+            <a:pPr algn="l">
+              <a:lnSpc>
+                <a:spcPct val="100000"/>
+              </a:lnSpc>
+            </a:pPr>
+            <a:r>
+              <a:rPr sz="1200" b="0">
+                <a:solidFill>
+                  <a:srgbClr val="2B2B2B"/>
+                </a:solidFill>
+                <a:latin typeface="Consolas"/>
+                <a:ea typeface="Microsoft YaHei"/>
+                <a:cs typeface="Consolas"/>
+              </a:rPr>
+              <a:t>30d067f tests: 新增 cli 分类（--version/--help/-e/--dis/--tokens/--stats/…</a:t>
+            </a:r>
+          </a:p>
+          <a:p>
+            <a:pPr algn="l">
+              <a:lnSpc>
+                <a:spcPct val="100000"/>
+              </a:lnSpc>
+            </a:pPr>
+            <a:r>
+              <a:rPr sz="1200" b="0">
+                <a:solidFill>
+                  <a:srgbClr val="2B2B2B"/>
+                </a:solidFill>
+                <a:latin typeface="Consolas"/>
+                <a:ea typeface="Microsoft YaHei"/>
+                <a:cs typeface="Consolas"/>
+              </a:rPr>
+              <a:t>a679ed3 docs: 补充测试中发现的模糊语义（fmt 舍入、区间显示与 in、移位位数、插值中的花括号、遮蔽规则等）</a:t>
+            </a:r>
+          </a:p>
+          <a:p>
+            <a:pPr algn="l">
+              <a:lnSpc>
+                <a:spcPct val="100000"/>
+              </a:lnSpc>
+            </a:pPr>
+            <a:r>
+              <a:rPr sz="1200" b="0">
+                <a:solidFill>
+                  <a:srgbClr val="2B2B2B"/>
+                </a:solidFill>
+                <a:latin typeface="Consolas"/>
+                <a:ea typeface="Microsoft YaHei"/>
+                <a:cs typeface="Consolas"/>
+              </a:rPr>
+              <a:t>2bf9c7c 2048：交互界面（ANSI 上色、命令解析、撤销/重来/帮助、最高分文件、moves.txt 重放）</a:t>
+            </a:r>
+          </a:p>
+          <a:p>
+            <a:pPr algn="l">
+              <a:lnSpc>
+                <a:spcPct val="100000"/>
+              </a:lnSpc>
+            </a:pPr>
+            <a:r>
+              <a:rPr sz="1200" b="0">
+                <a:solidFill>
+                  <a:srgbClr val="2B2B2B"/>
+                </a:solidFill>
+                <a:latin typeface="Consolas"/>
+                <a:ea typeface="Microsoft YaHei"/>
+                <a:cs typeface="Consolas"/>
+              </a:rPr>
+              <a:t>1dca9e8 tests: 运行器跳过 _ 开头的目录</a:t>
+            </a:r>
+          </a:p>
+          <a:p>
+            <a:pPr algn="l">
+              <a:lnSpc>
+                <a:spcPct val="100000"/>
+              </a:lnSpc>
+            </a:pPr>
+            <a:r>
+              <a:rPr sz="1200" b="0">
+                <a:solidFill>
+                  <a:srgbClr val="2B2B2B"/>
+                </a:solidFill>
+                <a:latin typeface="Consolas"/>
+                <a:ea typeface="Microsoft YaHei"/>
+                <a:cs typeface="Consolas"/>
+              </a:rPr>
+              <a:t>9421e18 2048：expectimax AI（线评估缓存、置换表、按空格数调整深度）</a:t>
+            </a:r>
+          </a:p>
+          <a:p>
+            <a:pPr algn="l">
+              <a:lnSpc>
+                <a:spcPct val="100000"/>
+              </a:lnSpc>
+            </a:pPr>
+            <a:r>
+              <a:rPr sz="1200" b="0">
+                <a:solidFill>
+                  <a:srgbClr val="2B2B2B"/>
+                </a:solidFill>
+                <a:latin typeface="Consolas"/>
+                <a:ea typeface="Microsoft YaHei"/>
+                <a:cs typeface="Consolas"/>
+              </a:rPr>
+              <a:t>0042b1c docs+fix: 根据 2048 Agent 的开发记录改进文档与报错</a:t>
+            </a:r>
+          </a:p>
+          <a:p>
+            <a:pPr algn="l">
+              <a:lnSpc>
+                <a:spcPct val="100000"/>
+              </a:lnSpc>
+            </a:pPr>
+            <a:r>
+              <a:rPr sz="1200" b="0">
+                <a:solidFill>
+                  <a:srgbClr val="2B2B2B"/>
+                </a:solidFill>
+                <a:latin typeface="Consolas"/>
+                <a:ea typeface="Microsoft YaHei"/>
+                <a:cs typeface="Consolas"/>
+              </a:rPr>
+              <a:t>e7c7227 2048：README、AI 跑分脚本、开发记录（6 局跑分、评估与报错统计）</a:t>
+            </a:r>
+          </a:p>
+          <a:p>
+            <a:pPr algn="l">
+              <a:lnSpc>
+                <a:spcPct val="100000"/>
+              </a:lnSpc>
+            </a:pPr>
+            <a:r>
+              <a:rPr sz="1200" b="0">
+                <a:solidFill>
+                  <a:srgbClr val="2B2B2B"/>
+                </a:solidFill>
+                <a:latin typeface="Consolas"/>
+                <a:ea typeface="Microsoft YaHei"/>
+                <a:cs typeface="Consolas"/>
+              </a:rPr>
+              <a:t>19b9bb5 bench: 最终性能测试结果（几何平均快 1.44 倍）与报告</a:t>
+            </a:r>
+          </a:p>
         </p:txBody>
       </p:sp>
       <p:sp>
@@ -9907,7 +11489,7 @@
                 <a:ea typeface="Microsoft YaHei"/>
                 <a:cs typeface="Microsoft YaHei"/>
               </a:rPr>
-              <a:t>gcov 行覆盖率 65.9%（4995 行可执行代码）</a:t>
+              <a:t>gcov 行覆盖率 94.4%（5043 行可执行代码）</a:t>
             </a:r>
           </a:p>
           <a:p>
@@ -10120,7 +11702,7 @@
                 <a:ea typeface="Microsoft YaHei"/>
                 <a:cs typeface="Microsoft YaHei"/>
               </a:rPr>
-              <a:t> 实现：7,815 行 C99，单遍编译 + computed goto 虚拟机 + 标记清除 GC</a:t>
+              <a:t> 实现：7,897 行 C99，单遍编译 + computed goto 虚拟机 + 标记清除 GC</a:t>
             </a:r>
           </a:p>
           <a:p>
@@ -10149,7 +11731,7 @@
                 <a:ea typeface="Microsoft YaHei"/>
                 <a:cs typeface="Microsoft YaHei"/>
               </a:rPr>
-              <a:t> 测试：136 个黑盒测试一键运行，GC 压力模式与覆盖率统计</a:t>
+              <a:t> 测试：327 个黑盒测试一键运行，GC 压力模式与覆盖率统计</a:t>
             </a:r>
           </a:p>
           <a:p>
@@ -10178,7 +11760,7 @@
                 <a:ea typeface="Microsoft YaHei"/>
                 <a:cs typeface="Microsoft YaHei"/>
               </a:rPr>
-              <a:t> 性能：9 组用例几何平均比 CPython 快 1.37 倍，弱项有根因分析</a:t>
+              <a:t> 性能：9 组用例几何平均比 CPython 快 1.44 倍，弱项有根因分析</a:t>
             </a:r>
           </a:p>
           <a:p>
@@ -10207,7 +11789,7 @@
                 <a:ea typeface="Microsoft YaHei"/>
                 <a:cs typeface="Microsoft YaHei"/>
               </a:rPr>
-              <a:t> AI：Skill 文档让新 Agent 独立写出 669 行的 2048 + AI，开发记录反哺文档</a:t>
+              <a:t> AI：Skill 文档让新 Agent 独立写出 925 行的 2048 + AI，开发记录反哺文档</a:t>
             </a:r>
           </a:p>
         </p:txBody>
@@ -10744,7 +12326,7 @@
                 <a:ea typeface="Microsoft YaHei"/>
                 <a:cs typeface="Microsoft YaHei"/>
               </a:rPr>
-              <a:t>C99 实现，7,815 行，零依赖</a:t>
+              <a:t>C99 实现，7,897 行，零依赖</a:t>
             </a:r>
           </a:p>
         </p:txBody>
@@ -10927,7 +12509,7 @@
                 <a:ea typeface="Microsoft YaHei"/>
                 <a:cs typeface="Microsoft YaHei"/>
               </a:rPr>
-              <a:t>136 个黑盒测试，8 个分类</a:t>
+              <a:t>327 个黑盒测试，20 个分类</a:t>
             </a:r>
           </a:p>
           <a:p>
@@ -11226,7 +12808,7 @@
                 <a:ea typeface="Microsoft YaHei"/>
                 <a:cs typeface="Microsoft YaHei"/>
               </a:rPr>
-              <a:t>几何平均快 1.37 倍</a:t>
+              <a:t>几何平均快 1.44 倍</a:t>
             </a:r>
           </a:p>
           <a:p>
@@ -16847,7 +18429,7 @@
                           <a:ea typeface="Microsoft YaHei"/>
                           <a:cs typeface="Microsoft YaHei"/>
                         </a:rPr>
-                        <a:t>1700</a:t>
+                        <a:t>1749</a:t>
                       </a:r>
                     </a:p>
                   </a:txBody>
@@ -16871,7 +18453,7 @@
                           <a:ea typeface="Microsoft YaHei"/>
                           <a:cs typeface="Microsoft YaHei"/>
                         </a:rPr>
-                        <a:t>1683</a:t>
+                        <a:t>1712</a:t>
                       </a:r>
                     </a:p>
                   </a:txBody>
@@ -16943,7 +18525,7 @@
                           <a:ea typeface="Microsoft YaHei"/>
                           <a:cs typeface="Microsoft YaHei"/>
                         </a:rPr>
-                        <a:t>235</a:t>
+                        <a:t>236</a:t>
                       </a:r>
                     </a:p>
                   </a:txBody>
@@ -16991,7 +18573,7 @@
                           <a:ea typeface="Microsoft YaHei"/>
                           <a:cs typeface="Microsoft YaHei"/>
                         </a:rPr>
-                        <a:t>7815</a:t>
+                        <a:t>7897</a:t>
                       </a:r>
                     </a:p>
                   </a:txBody>

--- a/docs/GZG语言介绍.pptx
+++ b/docs/GZG语言介绍.pptx
@@ -6424,7 +6424,7 @@
                 <a:ea typeface="Microsoft YaHei"/>
                 <a:cs typeface="Microsoft YaHei"/>
               </a:rPr>
-              <a:t>9 组功能相同的脚本，输出逐字校验一致；每项运行 5 次取中位数（含进程启动）</a:t>
+              <a:t>9 组功能相同的脚本，输出逐字校验一致；每项 5 次取中位数；计时驱动 bench/run_bench.gzg 也用 GZG 编写</a:t>
             </a:r>
           </a:p>
         </p:txBody>
@@ -6696,7 +6696,7 @@
                           <a:ea typeface="Microsoft YaHei"/>
                           <a:cs typeface="Microsoft YaHei"/>
                         </a:rPr>
-                        <a:t>0.169s</a:t>
+                        <a:t>0.201s</a:t>
                       </a:r>
                     </a:p>
                   </a:txBody>
@@ -6720,7 +6720,7 @@
                           <a:ea typeface="Microsoft YaHei"/>
                           <a:cs typeface="Microsoft YaHei"/>
                         </a:rPr>
-                        <a:t>0.242s</a:t>
+                        <a:t>0.278s</a:t>
                       </a:r>
                     </a:p>
                   </a:txBody>
@@ -6744,7 +6744,7 @@
                           <a:ea typeface="Microsoft YaHei"/>
                           <a:cs typeface="Microsoft YaHei"/>
                         </a:rPr>
-                        <a:t>1.43x</a:t>
+                        <a:t>1.39x</a:t>
                       </a:r>
                     </a:p>
                   </a:txBody>
@@ -6794,7 +6794,7 @@
                           <a:ea typeface="Microsoft YaHei"/>
                           <a:cs typeface="Microsoft YaHei"/>
                         </a:rPr>
-                        <a:t>0.213s</a:t>
+                        <a:t>0.251s</a:t>
                       </a:r>
                     </a:p>
                   </a:txBody>
@@ -6818,7 +6818,7 @@
                           <a:ea typeface="Microsoft YaHei"/>
                           <a:cs typeface="Microsoft YaHei"/>
                         </a:rPr>
-                        <a:t>0.293s</a:t>
+                        <a:t>0.348s</a:t>
                       </a:r>
                     </a:p>
                   </a:txBody>
@@ -6842,7 +6842,7 @@
                           <a:ea typeface="Microsoft YaHei"/>
                           <a:cs typeface="Microsoft YaHei"/>
                         </a:rPr>
-                        <a:t>1.38x</a:t>
+                        <a:t>1.39x</a:t>
                       </a:r>
                     </a:p>
                   </a:txBody>
@@ -6892,7 +6892,7 @@
                           <a:ea typeface="Microsoft YaHei"/>
                           <a:cs typeface="Microsoft YaHei"/>
                         </a:rPr>
-                        <a:t>0.120s</a:t>
+                        <a:t>0.150s</a:t>
                       </a:r>
                     </a:p>
                   </a:txBody>
@@ -6916,7 +6916,7 @@
                           <a:ea typeface="Microsoft YaHei"/>
                           <a:cs typeface="Microsoft YaHei"/>
                         </a:rPr>
-                        <a:t>0.451s</a:t>
+                        <a:t>0.474s</a:t>
                       </a:r>
                     </a:p>
                   </a:txBody>
@@ -6940,7 +6940,7 @@
                           <a:ea typeface="Microsoft YaHei"/>
                           <a:cs typeface="Microsoft YaHei"/>
                         </a:rPr>
-                        <a:t>3.77x</a:t>
+                        <a:t>3.16x</a:t>
                       </a:r>
                     </a:p>
                   </a:txBody>
@@ -6990,7 +6990,7 @@
                           <a:ea typeface="Microsoft YaHei"/>
                           <a:cs typeface="Microsoft YaHei"/>
                         </a:rPr>
-                        <a:t>0.082s</a:t>
+                        <a:t>0.119s</a:t>
                       </a:r>
                     </a:p>
                   </a:txBody>
@@ -7014,7 +7014,7 @@
                           <a:ea typeface="Microsoft YaHei"/>
                           <a:cs typeface="Microsoft YaHei"/>
                         </a:rPr>
-                        <a:t>0.150s</a:t>
+                        <a:t>0.195s</a:t>
                       </a:r>
                     </a:p>
                   </a:txBody>
@@ -7038,7 +7038,7 @@
                           <a:ea typeface="Microsoft YaHei"/>
                           <a:cs typeface="Microsoft YaHei"/>
                         </a:rPr>
-                        <a:t>1.82x</a:t>
+                        <a:t>1.63x</a:t>
                       </a:r>
                     </a:p>
                   </a:txBody>
@@ -7088,7 +7088,7 @@
                           <a:ea typeface="Microsoft YaHei"/>
                           <a:cs typeface="Microsoft YaHei"/>
                         </a:rPr>
-                        <a:t>0.331s</a:t>
+                        <a:t>0.359s</a:t>
                       </a:r>
                     </a:p>
                   </a:txBody>
@@ -7112,7 +7112,7 @@
                           <a:ea typeface="Microsoft YaHei"/>
                           <a:cs typeface="Microsoft YaHei"/>
                         </a:rPr>
-                        <a:t>0.519s</a:t>
+                        <a:t>0.562s</a:t>
                       </a:r>
                     </a:p>
                   </a:txBody>
@@ -7136,7 +7136,7 @@
                           <a:ea typeface="Microsoft YaHei"/>
                           <a:cs typeface="Microsoft YaHei"/>
                         </a:rPr>
-                        <a:t>1.57x</a:t>
+                        <a:t>1.56x</a:t>
                       </a:r>
                     </a:p>
                   </a:txBody>
@@ -7186,7 +7186,7 @@
                           <a:ea typeface="Microsoft YaHei"/>
                           <a:cs typeface="Microsoft YaHei"/>
                         </a:rPr>
-                        <a:t>0.326s</a:t>
+                        <a:t>0.365s</a:t>
                       </a:r>
                     </a:p>
                   </a:txBody>
@@ -7210,7 +7210,7 @@
                           <a:ea typeface="Microsoft YaHei"/>
                           <a:cs typeface="Microsoft YaHei"/>
                         </a:rPr>
-                        <a:t>0.612s</a:t>
+                        <a:t>0.619s</a:t>
                       </a:r>
                     </a:p>
                   </a:txBody>
@@ -7234,7 +7234,7 @@
                           <a:ea typeface="Microsoft YaHei"/>
                           <a:cs typeface="Microsoft YaHei"/>
                         </a:rPr>
-                        <a:t>1.88x</a:t>
+                        <a:t>1.70x</a:t>
                       </a:r>
                     </a:p>
                   </a:txBody>
@@ -7284,7 +7284,7 @@
                           <a:ea typeface="Microsoft YaHei"/>
                           <a:cs typeface="Microsoft YaHei"/>
                         </a:rPr>
-                        <a:t>0.479s</a:t>
+                        <a:t>0.508s</a:t>
                       </a:r>
                     </a:p>
                   </a:txBody>
@@ -7308,7 +7308,7 @@
                           <a:ea typeface="Microsoft YaHei"/>
                           <a:cs typeface="Microsoft YaHei"/>
                         </a:rPr>
-                        <a:t>1.065s</a:t>
+                        <a:t>1.136s</a:t>
                       </a:r>
                     </a:p>
                   </a:txBody>
@@ -7332,7 +7332,7 @@
                           <a:ea typeface="Microsoft YaHei"/>
                           <a:cs typeface="Microsoft YaHei"/>
                         </a:rPr>
-                        <a:t>2.22x</a:t>
+                        <a:t>2.23x</a:t>
                       </a:r>
                     </a:p>
                   </a:txBody>
@@ -7382,7 +7382,7 @@
                           <a:ea typeface="Microsoft YaHei"/>
                           <a:cs typeface="Microsoft YaHei"/>
                         </a:rPr>
-                        <a:t>0.561s</a:t>
+                        <a:t>0.612s</a:t>
                       </a:r>
                     </a:p>
                   </a:txBody>
@@ -7406,7 +7406,7 @@
                           <a:ea typeface="Microsoft YaHei"/>
                           <a:cs typeface="Microsoft YaHei"/>
                         </a:rPr>
-                        <a:t>0.129s</a:t>
+                        <a:t>0.169s</a:t>
                       </a:r>
                     </a:p>
                   </a:txBody>
@@ -7430,7 +7430,7 @@
                           <a:ea typeface="Microsoft YaHei"/>
                           <a:cs typeface="Microsoft YaHei"/>
                         </a:rPr>
-                        <a:t>0.23x</a:t>
+                        <a:t>0.28x</a:t>
                       </a:r>
                     </a:p>
                   </a:txBody>
@@ -7480,7 +7480,7 @@
                           <a:ea typeface="Microsoft YaHei"/>
                           <a:cs typeface="Microsoft YaHei"/>
                         </a:rPr>
-                        <a:t>0.177s</a:t>
+                        <a:t>0.212s</a:t>
                       </a:r>
                     </a:p>
                   </a:txBody>
@@ -7504,7 +7504,7 @@
                           <a:ea typeface="Microsoft YaHei"/>
                           <a:cs typeface="Microsoft YaHei"/>
                         </a:rPr>
-                        <a:t>0.237s</a:t>
+                        <a:t>0.284s</a:t>
                       </a:r>
                     </a:p>
                   </a:txBody>
@@ -7626,7 +7626,7 @@
                           <a:ea typeface="Microsoft YaHei"/>
                           <a:cs typeface="Microsoft YaHei"/>
                         </a:rPr>
-                        <a:t>1.44x</a:t>
+                        <a:t>1.41x</a:t>
                       </a:r>
                     </a:p>
                   </a:txBody>
@@ -8062,7 +8062,7 @@
                 <a:ea typeface="Microsoft YaHei"/>
                 <a:cs typeface="Microsoft YaHei"/>
               </a:rPr>
-              <a:t>数值 for 循环用专用指令，不创建迭代器对象：loop 用例快 3.8 倍</a:t>
+              <a:t>数值 for 循环用专用指令，不创建迭代器对象：loop 用例快 3.2 倍</a:t>
             </a:r>
           </a:p>
           <a:p>
@@ -11288,6 +11288,24 @@
               <a:t>19b9bb5 bench: 最终性能测试结果（几何平均快 1.44 倍）与报告</a:t>
             </a:r>
           </a:p>
+          <a:p>
+            <a:pPr algn="l">
+              <a:lnSpc>
+                <a:spcPct val="100000"/>
+              </a:lnSpc>
+            </a:pPr>
+            <a:r>
+              <a:rPr sz="1200" b="0">
+                <a:solidFill>
+                  <a:srgbClr val="2B2B2B"/>
+                </a:solidFill>
+                <a:latin typeface="Consolas"/>
+                <a:ea typeface="Microsoft YaHei"/>
+                <a:cs typeface="Consolas"/>
+              </a:rPr>
+              <a:t>e34ec0c docs: 生成最终 PPT（18 页）；README 更新最终数字</a:t>
+            </a:r>
+          </a:p>
         </p:txBody>
       </p:sp>
       <p:sp>
@@ -11760,7 +11778,7 @@
                 <a:ea typeface="Microsoft YaHei"/>
                 <a:cs typeface="Microsoft YaHei"/>
               </a:rPr>
-              <a:t> 性能：9 组用例几何平均比 CPython 快 1.44 倍，弱项有根因分析</a:t>
+              <a:t> 性能：9 组用例几何平均比 CPython 快 1.41 倍，弱项有根因分析</a:t>
             </a:r>
           </a:p>
           <a:p>
@@ -12779,7 +12797,7 @@
                 <a:ea typeface="Microsoft YaHei"/>
                 <a:cs typeface="Microsoft YaHei"/>
               </a:rPr>
-              <a:t>9 组同功能 GZG / Python 脚本</a:t>
+              <a:t>9 组同功能 GZG / Python 脚本，驱动用 GZG 写</a:t>
             </a:r>
           </a:p>
           <a:p>
@@ -12808,7 +12826,7 @@
                 <a:ea typeface="Microsoft YaHei"/>
                 <a:cs typeface="Microsoft YaHei"/>
               </a:rPr>
-              <a:t>几何平均快 1.44 倍</a:t>
+              <a:t>几何平均快 1.41 倍</a:t>
             </a:r>
           </a:p>
           <a:p>
